--- a/misc/inclass5.pptx
+++ b/misc/inclass5.pptx
@@ -107,6 +107,11 @@
       </a:defRPr>
     </a:lvl9pPr>
   </p:defaultTextStyle>
+  <p:extLst>
+    <p:ext uri="{EFAFB233-063F-42B5-8137-9DF3F51BA10A}">
+      <p15:sldGuideLst xmlns:p15="http://schemas.microsoft.com/office/powerpoint/2012/main"/>
+    </p:ext>
+  </p:extLst>
 </p:presentation>
 </file>
 
@@ -3823,6 +3828,17 @@
               <a:t>.28.</a:t>
             </a:r>
             <a:r>
+              <a:rPr lang="en-US" altLang="zh-TW" sz="2000" dirty="0">
+                <a:solidFill>
+                  <a:srgbClr val="333333"/>
+                </a:solidFill>
+                <a:latin typeface="MesloLGS Nerd Font Mono" panose="020B0609030804020204" pitchFamily="49" charset="0"/>
+                <a:ea typeface="MesloLGS Nerd Font Mono" panose="020B0609030804020204" pitchFamily="49" charset="0"/>
+                <a:cs typeface="MesloLGS Nerd Font Mono" panose="020B0609030804020204" pitchFamily="49" charset="0"/>
+              </a:rPr>
+              <a:t>1</a:t>
+            </a:r>
+            <a:r>
               <a:rPr lang="en-US" altLang="zh-TW" sz="2000" b="0" i="0" dirty="0">
                 <a:solidFill>
                   <a:srgbClr val="333333"/>
@@ -3832,7 +3848,7 @@
                 <a:ea typeface="MesloLGS Nerd Font Mono" panose="020B0609030804020204" pitchFamily="49" charset="0"/>
                 <a:cs typeface="MesloLGS Nerd Font Mono" panose="020B0609030804020204" pitchFamily="49" charset="0"/>
               </a:rPr>
-              <a:t>0/</a:t>
+              <a:t>/</a:t>
             </a:r>
             <a:r>
               <a:rPr lang="en-US" altLang="zh-TW" sz="2000" b="0" i="0" dirty="0">
@@ -3932,7 +3948,7 @@
                 <a:ea typeface="MesloLGS Nerd Font Mono" panose="020B0609030804020204" pitchFamily="49" charset="0"/>
                 <a:cs typeface="MesloLGS Nerd Font Mono" panose="020B0609030804020204" pitchFamily="49" charset="0"/>
               </a:rPr>
-              <a:t>.0/</a:t>
+              <a:t>.3/</a:t>
             </a:r>
             <a:r>
               <a:rPr lang="en-US" altLang="zh-TW" sz="2000" b="0" i="0" dirty="0">
@@ -4033,7 +4049,7 @@
                 <a:ea typeface="MesloLGS Nerd Font Mono" panose="020B0609030804020204" pitchFamily="49" charset="0"/>
                 <a:cs typeface="MesloLGS Nerd Font Mono" panose="020B0609030804020204" pitchFamily="49" charset="0"/>
               </a:rPr>
-              <a:t>.0/</a:t>
+              <a:t>.2/</a:t>
             </a:r>
             <a:r>
               <a:rPr lang="en-US" altLang="zh-TW" sz="2000" b="0" i="0" dirty="0">
@@ -4131,7 +4147,7 @@
                 <a:ea typeface="MesloLGS Nerd Font Mono" panose="020B0609030804020204" pitchFamily="49" charset="0"/>
                 <a:cs typeface="MesloLGS Nerd Font Mono" panose="020B0609030804020204" pitchFamily="49" charset="0"/>
               </a:rPr>
-              <a:t>.0/</a:t>
+              <a:t>.4/</a:t>
             </a:r>
             <a:r>
               <a:rPr lang="en-US" altLang="zh-TW" sz="2000" b="0" i="0" dirty="0">
